--- a/docs/speech/parts/speech-01-开场与总体介绍.pptx
+++ b/docs/speech/parts/speech-01-开场与总体介绍.pptx
@@ -8,16 +8,16 @@
     <p:notesMasterId r:id="rId4"/>
   </p:notesMasterIdLst>
   <p:sldIdLst>
-    <p:sldId id="256" r:id="rIdSl1"/>
-    <p:sldId id="257" r:id="rIdSl2"/>
-    <p:sldId id="258" r:id="rIdSl3"/>
-    <p:sldId id="259" r:id="rIdSl4"/>
-    <p:sldId id="260" r:id="rIdSl5"/>
-    <p:sldId id="261" r:id="rIdSl6"/>
-    <p:sldId id="262" r:id="rIdSl7"/>
-    <p:sldId id="263" r:id="rIdSl8"/>
-    <p:sldId id="264" r:id="rIdSl9"/>
-    <p:sldId id="265" r:id="rIdSl10"/>
+    <p:sldId id="256" r:id="rId3"/>
+    <p:sldId id="257" r:id="rId5"/>
+    <p:sldId id="258" r:id="rId6"/>
+    <p:sldId id="259" r:id="rId7"/>
+    <p:sldId id="260" r:id="rId8"/>
+    <p:sldId id="261" r:id="rId9"/>
+    <p:sldId id="262" r:id="rId10"/>
+    <p:sldId id="263" r:id="rId11"/>
+    <p:sldId id="264" r:id="rId12"/>
+    <p:sldId id="265" r:id="rId13"/>
   </p:sldIdLst>
   <p:sldSz cx="12192000" cy="6858000"/>
   <p:notesSz cx="6858000" cy="12192000"/>
@@ -237,7 +237,7 @@
 </file>
 
 <file path=ppt/notesSlides/notesSlide1.xml><?xml version="1.0" encoding="utf-8"?>
-<p:notes xmlns:p="http://schemas.openxmlformats.org/presentationml/2006/main" xmlns:a="http://schemas.openxmlformats.org/drawingml/2006/main" xmlns:r="http://schemas.openxmlformats.org/officeDocument/2006/relationships">
+<p:notes xmlns:a="http://schemas.openxmlformats.org/drawingml/2006/main" xmlns:r="http://schemas.openxmlformats.org/officeDocument/2006/relationships" xmlns:p="http://schemas.openxmlformats.org/presentationml/2006/main">
   <p:cSld>
     <p:spTree>
       <p:nvGrpSpPr>
@@ -272,6 +272,7 @@
               <a:rPr lang="zh-CN" dirty="0"/>
               <a:t>这是整套课程的第一讲，先解决「为什么要用」。我们写服务端，真正属于业务的代码很少，大量时间花在五类重复劳动上：对象怎么创建、接口开头那十几行校验、每张表重写 CRUD、事务边界靠人肉保证、以及每个项目重新选型。fountain 用四十多个模块把这些收干净。这一讲还会给你完整的课程地图，方便按需跳看。</a:t>
             </a:r>
+            <a:endParaRPr lang="zh-CN" dirty="0"/>
           </a:p>
         </p:txBody>
       </p:sp>
@@ -284,7 +285,7 @@
 </file>
 
 <file path=ppt/notesSlides/notesSlide10.xml><?xml version="1.0" encoding="utf-8"?>
-<p:notes xmlns:p="http://schemas.openxmlformats.org/presentationml/2006/main" xmlns:a="http://schemas.openxmlformats.org/drawingml/2006/main" xmlns:r="http://schemas.openxmlformats.org/officeDocument/2006/relationships">
+<p:notes xmlns:a="http://schemas.openxmlformats.org/drawingml/2006/main" xmlns:r="http://schemas.openxmlformats.org/officeDocument/2006/relationships" xmlns:p="http://schemas.openxmlformats.org/presentationml/2006/main">
   <p:cSld>
     <p:spTree>
       <p:nvGrpSpPr>
@@ -319,6 +320,7 @@
               <a:rPr lang="zh-CN" dirty="0"/>
               <a:t>这一讲是总纲。三个要点：一，服务端真正属于业务的代码很少，大量时间花在非业务复杂度上；二，fountain 把配置、IOC、AOP、数据、MVC、ORM、安全、日志、底座全部收进一个工具库；三，整套课程按 25 讲拆分，每讲十到十五分钟，可以按需跳看。</a:t>
             </a:r>
+            <a:endParaRPr lang="zh-CN" dirty="0"/>
           </a:p>
         </p:txBody>
       </p:sp>
@@ -1307,7 +1309,7 @@
 </file>
 
 <file path=ppt/slides/slide1.xml><?xml version="1.0" encoding="utf-8"?>
-<p:sld xmlns:r="http://schemas.openxmlformats.org/officeDocument/2006/relationships" xmlns:p="http://schemas.openxmlformats.org/presentationml/2006/main" xmlns:a="http://schemas.openxmlformats.org/drawingml/2006/main">
+<p:sld xmlns:a="http://schemas.openxmlformats.org/drawingml/2006/main" xmlns:r="http://schemas.openxmlformats.org/officeDocument/2006/relationships" xmlns:p="http://schemas.openxmlformats.org/presentationml/2006/main">
   <p:cSld>
     <p:spTree>
       <p:nvGrpSpPr>
@@ -1325,12 +1327,12 @@
       </p:grpSpPr>
       <p:sp>
         <p:nvSpPr>
-          <p:cNvPr id="2" name=""/>
+          <p:cNvPr id="2" name="矩形 1"/>
           <p:cNvSpPr/>
           <p:nvPr/>
         </p:nvSpPr>
         <p:spPr>
-          <a:xfrm rot="0" flipH="0" flipV="0">
+          <a:xfrm>
             <a:off x="0" y="0"/>
             <a:ext cx="12192000" cy="6858000"/>
           </a:xfrm>
@@ -1340,7 +1342,6 @@
           <a:solidFill>
             <a:srgbClr val="0B1220"/>
           </a:solidFill>
-          <a:ln/>
         </p:spPr>
         <p:txBody>
           <a:bodyPr/>
@@ -1349,16 +1350,18 @@
       </p:sp>
       <p:sp>
         <p:nvSpPr>
-          <p:cNvPr id="3" name=""/>
+          <p:cNvPr id="3" name="文本框 2"/>
           <p:cNvSpPr txBox="1"/>
           <p:nvPr/>
         </p:nvSpPr>
         <p:spPr>
-          <a:xfrm rot="0" flipH="0" flipV="0">
-            <a:off x="-695325" y="1143000"/>
+          <a:xfrm>
+            <a:off x="73025" y="1143000"/>
             <a:ext cx="12506325" cy="3657600"/>
           </a:xfrm>
-          <a:prstGeom prst="rect"/>
+          <a:prstGeom prst="rect">
+            <a:avLst/>
+          </a:prstGeom>
         </p:spPr>
         <p:txBody>
           <a:bodyPr wrap="none" lIns="0" tIns="0" rIns="0" bIns="0"/>
@@ -1378,18 +1381,24 @@
               </a:rPr>
               <a:t>01</a:t>
             </a:r>
-            <a:endParaRPr/>
-          </a:p>
-        </p:txBody>
-      </p:sp>
-      <p:sp>
-        <p:nvSpPr>
-          <p:cNvPr id="4" name=""/>
+            <a:endParaRPr lang="en-US" sz="24000" b="1">
+              <a:solidFill>
+                <a:srgbClr val="16233A"/>
+              </a:solidFill>
+              <a:latin typeface="JetBrains Mono"/>
+              <a:ea typeface="JetBrains Mono"/>
+            </a:endParaRPr>
+          </a:p>
+        </p:txBody>
+      </p:sp>
+      <p:sp>
+        <p:nvSpPr>
+          <p:cNvPr id="4" name="矩形 3"/>
           <p:cNvSpPr/>
           <p:nvPr/>
         </p:nvSpPr>
         <p:spPr>
-          <a:xfrm rot="0" flipH="0" flipV="0">
+          <a:xfrm>
             <a:off x="0" y="0"/>
             <a:ext cx="76200" cy="6858000"/>
           </a:xfrm>
@@ -1407,7 +1416,6 @@
             </a:gsLst>
             <a:lin ang="2700000" scaled="1"/>
           </a:gradFill>
-          <a:ln/>
         </p:spPr>
         <p:txBody>
           <a:bodyPr/>
@@ -1416,12 +1424,12 @@
       </p:sp>
       <p:sp>
         <p:nvSpPr>
-          <p:cNvPr id="5" name=""/>
+          <p:cNvPr id="5" name="矩形 4"/>
           <p:cNvSpPr/>
           <p:nvPr/>
         </p:nvSpPr>
         <p:spPr>
-          <a:xfrm rot="0" flipH="0" flipV="0">
+          <a:xfrm>
             <a:off x="1143000" y="1866900"/>
             <a:ext cx="38100" cy="323850"/>
           </a:xfrm>
@@ -1431,7 +1439,6 @@
           <a:solidFill>
             <a:srgbClr val="38BDF8"/>
           </a:solidFill>
-          <a:ln/>
         </p:spPr>
         <p:txBody>
           <a:bodyPr/>
@@ -1440,16 +1447,18 @@
       </p:sp>
       <p:sp>
         <p:nvSpPr>
-          <p:cNvPr id="6" name=""/>
+          <p:cNvPr id="6" name="文本框 5"/>
           <p:cNvSpPr txBox="1"/>
           <p:nvPr/>
         </p:nvSpPr>
         <p:spPr>
-          <a:xfrm rot="0" flipH="0" flipV="0">
+          <a:xfrm>
             <a:off x="1333500" y="1952625"/>
             <a:ext cx="4267200" cy="171450"/>
           </a:xfrm>
-          <a:prstGeom prst="rect"/>
+          <a:prstGeom prst="rect">
+            <a:avLst/>
+          </a:prstGeom>
         </p:spPr>
         <p:txBody>
           <a:bodyPr wrap="none" lIns="0" tIns="0" rIns="0" bIns="0"/>
@@ -1469,22 +1478,30 @@
               </a:rPr>
               <a:t>PART 01 / 25 · 课程分册</a:t>
             </a:r>
-            <a:endParaRPr/>
-          </a:p>
-        </p:txBody>
-      </p:sp>
-      <p:sp>
-        <p:nvSpPr>
-          <p:cNvPr id="7" name=""/>
+            <a:endParaRPr lang="en-US" sz="1125" spc="300">
+              <a:solidFill>
+                <a:srgbClr val="38BDF8"/>
+              </a:solidFill>
+              <a:latin typeface="微软雅黑" panose="020B0503020204020204" charset="-122"/>
+              <a:ea typeface="微软雅黑" panose="020B0503020204020204" charset="-122"/>
+            </a:endParaRPr>
+          </a:p>
+        </p:txBody>
+      </p:sp>
+      <p:sp>
+        <p:nvSpPr>
+          <p:cNvPr id="7" name="文本框 6"/>
           <p:cNvSpPr txBox="1"/>
           <p:nvPr/>
         </p:nvSpPr>
         <p:spPr>
-          <a:xfrm rot="0" flipH="0" flipV="0">
+          <a:xfrm>
             <a:off x="1143000" y="2495550"/>
             <a:ext cx="2867025" cy="609600"/>
           </a:xfrm>
-          <a:prstGeom prst="rect"/>
+          <a:prstGeom prst="rect">
+            <a:avLst/>
+          </a:prstGeom>
         </p:spPr>
         <p:txBody>
           <a:bodyPr wrap="none" lIns="0" tIns="0" rIns="0" bIns="0"/>
@@ -1504,18 +1521,24 @@
               </a:rPr>
               <a:t>开场与总体介绍</a:t>
             </a:r>
-            <a:endParaRPr/>
-          </a:p>
-        </p:txBody>
-      </p:sp>
-      <p:sp>
-        <p:nvSpPr>
-          <p:cNvPr id="8" name=""/>
+            <a:endParaRPr lang="en-US" sz="3300" b="1">
+              <a:solidFill>
+                <a:srgbClr val="FFFFFF"/>
+              </a:solidFill>
+              <a:latin typeface="微软雅黑" panose="020B0503020204020204" charset="-122"/>
+              <a:ea typeface="微软雅黑" panose="020B0503020204020204" charset="-122"/>
+            </a:endParaRPr>
+          </a:p>
+        </p:txBody>
+      </p:sp>
+      <p:sp>
+        <p:nvSpPr>
+          <p:cNvPr id="8" name="矩形 7"/>
           <p:cNvSpPr/>
           <p:nvPr/>
         </p:nvSpPr>
         <p:spPr>
-          <a:xfrm rot="0" flipH="0" flipV="0">
+          <a:xfrm>
             <a:off x="1143000" y="3314700"/>
             <a:ext cx="1524000" cy="57150"/>
           </a:xfrm>
@@ -1533,7 +1556,6 @@
             </a:gsLst>
             <a:lin ang="2700000" scaled="1"/>
           </a:gradFill>
-          <a:ln/>
         </p:spPr>
         <p:txBody>
           <a:bodyPr/>
@@ -1542,16 +1564,18 @@
       </p:sp>
       <p:sp>
         <p:nvSpPr>
-          <p:cNvPr id="9" name=""/>
+          <p:cNvPr id="9" name="文本框 8"/>
           <p:cNvSpPr txBox="1"/>
           <p:nvPr/>
         </p:nvSpPr>
         <p:spPr>
-          <a:xfrm rot="0" flipH="0" flipV="0">
+          <a:xfrm>
             <a:off x="1143000" y="3771900"/>
             <a:ext cx="904875" cy="400050"/>
           </a:xfrm>
-          <a:prstGeom prst="rect"/>
+          <a:prstGeom prst="rect">
+            <a:avLst/>
+          </a:prstGeom>
         </p:spPr>
         <p:txBody>
           <a:bodyPr wrap="none" lIns="0" tIns="0" rIns="0" bIns="0"/>
@@ -1571,22 +1595,30 @@
               </a:rPr>
               <a:t>为什么用 fountain：我们到底在重复哪五类劳动</a:t>
             </a:r>
-            <a:endParaRPr/>
-          </a:p>
-        </p:txBody>
-      </p:sp>
-      <p:sp>
-        <p:nvSpPr>
-          <p:cNvPr id="10" name=""/>
+            <a:endParaRPr lang="en-US" sz="1350">
+              <a:solidFill>
+                <a:srgbClr val="94A3B8"/>
+              </a:solidFill>
+              <a:latin typeface="微软雅黑" panose="020B0503020204020204" charset="-122"/>
+              <a:ea typeface="微软雅黑" panose="020B0503020204020204" charset="-122"/>
+            </a:endParaRPr>
+          </a:p>
+        </p:txBody>
+      </p:sp>
+      <p:sp>
+        <p:nvSpPr>
+          <p:cNvPr id="10" name="文本框 9"/>
           <p:cNvSpPr txBox="1"/>
           <p:nvPr/>
         </p:nvSpPr>
         <p:spPr>
-          <a:xfrm rot="0" flipH="0" flipV="0">
+          <a:xfrm>
             <a:off x="1143000" y="4114800"/>
             <a:ext cx="904875" cy="400050"/>
           </a:xfrm>
-          <a:prstGeom prst="rect"/>
+          <a:prstGeom prst="rect">
+            <a:avLst/>
+          </a:prstGeom>
         </p:spPr>
         <p:txBody>
           <a:bodyPr wrap="none" lIns="0" tIns="0" rIns="0" bIns="0"/>
@@ -1606,22 +1638,30 @@
               </a:rPr>
               <a:t>fountain 是什么：核心能力与外围模块全景</a:t>
             </a:r>
-            <a:endParaRPr/>
-          </a:p>
-        </p:txBody>
-      </p:sp>
-      <p:sp>
-        <p:nvSpPr>
-          <p:cNvPr id="11" name=""/>
+            <a:endParaRPr lang="en-US" sz="1350">
+              <a:solidFill>
+                <a:srgbClr val="94A3B8"/>
+              </a:solidFill>
+              <a:latin typeface="微软雅黑" panose="020B0503020204020204" charset="-122"/>
+              <a:ea typeface="微软雅黑" panose="020B0503020204020204" charset="-122"/>
+            </a:endParaRPr>
+          </a:p>
+        </p:txBody>
+      </p:sp>
+      <p:sp>
+        <p:nvSpPr>
+          <p:cNvPr id="11" name="文本框 10"/>
           <p:cNvSpPr txBox="1"/>
           <p:nvPr/>
         </p:nvSpPr>
         <p:spPr>
-          <a:xfrm rot="0" flipH="0" flipV="0">
+          <a:xfrm>
             <a:off x="1143000" y="4457700"/>
             <a:ext cx="904875" cy="400050"/>
           </a:xfrm>
-          <a:prstGeom prst="rect"/>
+          <a:prstGeom prst="rect">
+            <a:avLst/>
+          </a:prstGeom>
         </p:spPr>
         <p:txBody>
           <a:bodyPr wrap="none" lIns="0" tIns="0" rIns="0" bIns="0"/>
@@ -1641,22 +1681,30 @@
               </a:rPr>
               <a:t>课程地图与录制前的环境检查</a:t>
             </a:r>
-            <a:endParaRPr/>
-          </a:p>
-        </p:txBody>
-      </p:sp>
-      <p:sp>
-        <p:nvSpPr>
-          <p:cNvPr id="12" name=""/>
+            <a:endParaRPr lang="en-US" sz="1350">
+              <a:solidFill>
+                <a:srgbClr val="64748B"/>
+              </a:solidFill>
+              <a:latin typeface="微软雅黑" panose="020B0503020204020204" charset="-122"/>
+              <a:ea typeface="微软雅黑" panose="020B0503020204020204" charset="-122"/>
+            </a:endParaRPr>
+          </a:p>
+        </p:txBody>
+      </p:sp>
+      <p:sp>
+        <p:nvSpPr>
+          <p:cNvPr id="12" name="文本框 11"/>
           <p:cNvSpPr txBox="1"/>
           <p:nvPr/>
         </p:nvSpPr>
         <p:spPr>
-          <a:xfrm rot="0" flipH="0" flipV="0">
+          <a:xfrm>
             <a:off x="1143000" y="5029200"/>
             <a:ext cx="914400" cy="161925"/>
           </a:xfrm>
-          <a:prstGeom prst="rect"/>
+          <a:prstGeom prst="rect">
+            <a:avLst/>
+          </a:prstGeom>
         </p:spPr>
         <p:txBody>
           <a:bodyPr wrap="none" lIns="0" tIns="0" rIns="0" bIns="0"/>
@@ -1676,22 +1724,30 @@
               </a:rPr>
               <a:t>第 1 讲 / 共 25 讲　·　原稿第 1–8 页 + 首尾两页　·　约 13.1 分钟</a:t>
             </a:r>
-            <a:endParaRPr/>
-          </a:p>
-        </p:txBody>
-      </p:sp>
-      <p:sp>
-        <p:nvSpPr>
-          <p:cNvPr id="13" name=""/>
+            <a:endParaRPr lang="en-US" sz="1050">
+              <a:solidFill>
+                <a:srgbClr val="64748B"/>
+              </a:solidFill>
+              <a:latin typeface="微软雅黑" panose="020B0503020204020204" charset="-122"/>
+              <a:ea typeface="微软雅黑" panose="020B0503020204020204" charset="-122"/>
+            </a:endParaRPr>
+          </a:p>
+        </p:txBody>
+      </p:sp>
+      <p:sp>
+        <p:nvSpPr>
+          <p:cNvPr id="13" name="文本框 12"/>
           <p:cNvSpPr txBox="1"/>
           <p:nvPr/>
         </p:nvSpPr>
         <p:spPr>
-          <a:xfrm rot="0" flipH="0" flipV="0">
+          <a:xfrm>
             <a:off x="609600" y="6362700"/>
             <a:ext cx="4352925" cy="152400"/>
           </a:xfrm>
-          <a:prstGeom prst="rect"/>
+          <a:prstGeom prst="rect">
+            <a:avLst/>
+          </a:prstGeom>
         </p:spPr>
         <p:txBody>
           <a:bodyPr wrap="none" lIns="0" tIns="0" rIns="0" bIns="0"/>
@@ -1709,7 +1765,7 @@
                 <a:latin typeface="微软雅黑" panose="020B0503020204020204" charset="-122"/>
                 <a:ea typeface="微软雅黑" panose="020B0503020204020204" charset="-122"/>
               </a:rPr>
-              <a:t xml:space="preserve">fountain · </a:t>
+              <a:t>fountain · </a:t>
             </a:r>
             <a:r>
               <a:rPr lang="zh-CN" sz="975">
@@ -1722,14 +1778,13 @@
               <a:t>一站式服务器应用开发工具库　　</a:t>
             </a:r>
             <a:r>
-              <a:rPr u="none" lang="en-US" sz="975">
+              <a:rPr lang="en-US" sz="975" u="none">
                 <a:solidFill>
                   <a:srgbClr val="64748B"/>
                 </a:solidFill>
                 <a:latin typeface="微软雅黑" panose="020B0503020204020204" charset="-122"/>
                 <a:ea typeface="微软雅黑" panose="020B0503020204020204" charset="-122"/>
               </a:rPr>
-              <a:hlinkClick r:id="rIdHlink1"/>
               <a:t>https://pkg.cangjie-lang.cn/org/fountain</a:t>
             </a:r>
             <a:r>
@@ -1743,27 +1798,35 @@
               <a:t>　　</a:t>
             </a:r>
             <a:r>
-              <a:rPr u="none" lang="en-US" sz="975">
+              <a:rPr lang="en-US" sz="975" u="none">
                 <a:solidFill>
                   <a:srgbClr val="64748B"/>
                 </a:solidFill>
                 <a:latin typeface="微软雅黑" panose="020B0503020204020204" charset="-122"/>
                 <a:ea typeface="微软雅黑" panose="020B0503020204020204" charset="-122"/>
               </a:rPr>
-              <a:hlinkClick r:id="rIdHlink2"/>
               <a:t>https://gitcode.com/Cangjie-SIG/fountain</a:t>
             </a:r>
-            <a:endParaRPr/>
+            <a:endParaRPr lang="en-US" sz="975" u="none">
+              <a:solidFill>
+                <a:srgbClr val="64748B"/>
+              </a:solidFill>
+              <a:latin typeface="微软雅黑" panose="020B0503020204020204" charset="-122"/>
+              <a:ea typeface="微软雅黑" panose="020B0503020204020204" charset="-122"/>
+            </a:endParaRPr>
           </a:p>
         </p:txBody>
       </p:sp>
     </p:spTree>
   </p:cSld>
+  <p:clrMapOvr>
+    <a:masterClrMapping/>
+  </p:clrMapOvr>
 </p:sld>
 </file>
 
 <file path=ppt/slides/slide10.xml><?xml version="1.0" encoding="utf-8"?>
-<p:sld xmlns:r="http://schemas.openxmlformats.org/officeDocument/2006/relationships" xmlns:p="http://schemas.openxmlformats.org/presentationml/2006/main" xmlns:a="http://schemas.openxmlformats.org/drawingml/2006/main">
+<p:sld xmlns:a="http://schemas.openxmlformats.org/drawingml/2006/main" xmlns:r="http://schemas.openxmlformats.org/officeDocument/2006/relationships" xmlns:p="http://schemas.openxmlformats.org/presentationml/2006/main">
   <p:cSld>
     <p:spTree>
       <p:nvGrpSpPr>
@@ -1781,12 +1844,12 @@
       </p:grpSpPr>
       <p:sp>
         <p:nvSpPr>
-          <p:cNvPr id="15" name=""/>
+          <p:cNvPr id="15" name="矩形 14"/>
           <p:cNvSpPr/>
           <p:nvPr/>
         </p:nvSpPr>
         <p:spPr>
-          <a:xfrm rot="0" flipH="0" flipV="0">
+          <a:xfrm>
             <a:off x="0" y="0"/>
             <a:ext cx="12192000" cy="6858000"/>
           </a:xfrm>
@@ -1796,7 +1859,6 @@
           <a:solidFill>
             <a:srgbClr val="0B1220"/>
           </a:solidFill>
-          <a:ln/>
         </p:spPr>
         <p:txBody>
           <a:bodyPr/>
@@ -1805,16 +1867,18 @@
       </p:sp>
       <p:sp>
         <p:nvSpPr>
-          <p:cNvPr id="16" name=""/>
+          <p:cNvPr id="16" name="文本框 15"/>
           <p:cNvSpPr txBox="1"/>
           <p:nvPr/>
         </p:nvSpPr>
         <p:spPr>
-          <a:xfrm rot="0" flipH="0" flipV="0">
+          <a:xfrm>
             <a:off x="8458200" y="1619250"/>
             <a:ext cx="3352800" cy="2286000"/>
           </a:xfrm>
-          <a:prstGeom prst="rect"/>
+          <a:prstGeom prst="rect">
+            <a:avLst/>
+          </a:prstGeom>
         </p:spPr>
         <p:txBody>
           <a:bodyPr wrap="none" lIns="0" tIns="0" rIns="0" bIns="0"/>
@@ -1834,18 +1898,24 @@
               </a:rPr>
               <a:t>END</a:t>
             </a:r>
-            <a:endParaRPr/>
-          </a:p>
-        </p:txBody>
-      </p:sp>
-      <p:sp>
-        <p:nvSpPr>
-          <p:cNvPr id="17" name=""/>
+            <a:endParaRPr lang="en-US" sz="15000" b="1">
+              <a:solidFill>
+                <a:srgbClr val="16233A"/>
+              </a:solidFill>
+              <a:latin typeface="JetBrains Mono"/>
+              <a:ea typeface="JetBrains Mono"/>
+            </a:endParaRPr>
+          </a:p>
+        </p:txBody>
+      </p:sp>
+      <p:sp>
+        <p:nvSpPr>
+          <p:cNvPr id="17" name="矩形 16"/>
           <p:cNvSpPr/>
           <p:nvPr/>
         </p:nvSpPr>
         <p:spPr>
-          <a:xfrm rot="0" flipH="0" flipV="0">
+          <a:xfrm>
             <a:off x="0" y="0"/>
             <a:ext cx="76200" cy="6858000"/>
           </a:xfrm>
@@ -1863,7 +1933,6 @@
             </a:gsLst>
             <a:lin ang="2700000" scaled="1"/>
           </a:gradFill>
-          <a:ln/>
         </p:spPr>
         <p:txBody>
           <a:bodyPr/>
@@ -1872,12 +1941,12 @@
       </p:sp>
       <p:sp>
         <p:nvSpPr>
-          <p:cNvPr id="18" name=""/>
+          <p:cNvPr id="18" name="矩形 17"/>
           <p:cNvSpPr/>
           <p:nvPr/>
         </p:nvSpPr>
         <p:spPr>
-          <a:xfrm rot="0" flipH="0" flipV="0">
+          <a:xfrm>
             <a:off x="1143000" y="1428750"/>
             <a:ext cx="38100" cy="323850"/>
           </a:xfrm>
@@ -1887,7 +1956,6 @@
           <a:solidFill>
             <a:srgbClr val="38BDF8"/>
           </a:solidFill>
-          <a:ln/>
         </p:spPr>
         <p:txBody>
           <a:bodyPr/>
@@ -1896,16 +1964,18 @@
       </p:sp>
       <p:sp>
         <p:nvSpPr>
-          <p:cNvPr id="19" name=""/>
+          <p:cNvPr id="19" name="文本框 18"/>
           <p:cNvSpPr txBox="1"/>
           <p:nvPr/>
         </p:nvSpPr>
         <p:spPr>
-          <a:xfrm rot="0" flipH="0" flipV="0">
+          <a:xfrm>
             <a:off x="1333500" y="1514475"/>
             <a:ext cx="3181350" cy="171450"/>
           </a:xfrm>
-          <a:prstGeom prst="rect"/>
+          <a:prstGeom prst="rect">
+            <a:avLst/>
+          </a:prstGeom>
         </p:spPr>
         <p:txBody>
           <a:bodyPr wrap="none" lIns="0" tIns="0" rIns="0" bIns="0"/>
@@ -1933,24 +2003,32 @@
                 <a:latin typeface="微软雅黑" panose="020B0503020204020204" charset="-122"/>
                 <a:ea typeface="微软雅黑" panose="020B0503020204020204" charset="-122"/>
               </a:rPr>
-              <a:t xml:space="preserve"> 01 / 25</a:t>
-            </a:r>
-            <a:endParaRPr/>
-          </a:p>
-        </p:txBody>
-      </p:sp>
-      <p:sp>
-        <p:nvSpPr>
-          <p:cNvPr id="20" name=""/>
+              <a:t> 01 / 25</a:t>
+            </a:r>
+            <a:endParaRPr lang="en-US" sz="1125" spc="300">
+              <a:solidFill>
+                <a:srgbClr val="38BDF8"/>
+              </a:solidFill>
+              <a:latin typeface="微软雅黑" panose="020B0503020204020204" charset="-122"/>
+              <a:ea typeface="微软雅黑" panose="020B0503020204020204" charset="-122"/>
+            </a:endParaRPr>
+          </a:p>
+        </p:txBody>
+      </p:sp>
+      <p:sp>
+        <p:nvSpPr>
+          <p:cNvPr id="20" name="文本框 19"/>
           <p:cNvSpPr txBox="1"/>
           <p:nvPr/>
         </p:nvSpPr>
         <p:spPr>
-          <a:xfrm rot="0" flipH="0" flipV="0">
+          <a:xfrm>
             <a:off x="1143000" y="2019300"/>
             <a:ext cx="2600325" cy="552450"/>
           </a:xfrm>
-          <a:prstGeom prst="rect"/>
+          <a:prstGeom prst="rect">
+            <a:avLst/>
+          </a:prstGeom>
         </p:spPr>
         <p:txBody>
           <a:bodyPr wrap="none" lIns="0" tIns="0" rIns="0" bIns="0"/>
@@ -1970,18 +2048,24 @@
               </a:rPr>
               <a:t>开场与总体介绍</a:t>
             </a:r>
-            <a:endParaRPr/>
-          </a:p>
-        </p:txBody>
-      </p:sp>
-      <p:sp>
-        <p:nvSpPr>
-          <p:cNvPr id="21" name=""/>
+            <a:endParaRPr lang="en-US" sz="3000" b="1">
+              <a:solidFill>
+                <a:srgbClr val="FFFFFF"/>
+              </a:solidFill>
+              <a:latin typeface="微软雅黑" panose="020B0503020204020204" charset="-122"/>
+              <a:ea typeface="微软雅黑" panose="020B0503020204020204" charset="-122"/>
+            </a:endParaRPr>
+          </a:p>
+        </p:txBody>
+      </p:sp>
+      <p:sp>
+        <p:nvSpPr>
+          <p:cNvPr id="21" name="矩形 20"/>
           <p:cNvSpPr/>
           <p:nvPr/>
         </p:nvSpPr>
         <p:spPr>
-          <a:xfrm rot="0" flipH="0" flipV="0">
+          <a:xfrm>
             <a:off x="1143000" y="2724150"/>
             <a:ext cx="1524000" cy="57150"/>
           </a:xfrm>
@@ -1999,7 +2083,6 @@
             </a:gsLst>
             <a:lin ang="2700000" scaled="1"/>
           </a:gradFill>
-          <a:ln/>
         </p:spPr>
         <p:txBody>
           <a:bodyPr/>
@@ -2008,16 +2091,18 @@
       </p:sp>
       <p:sp>
         <p:nvSpPr>
-          <p:cNvPr id="22" name=""/>
+          <p:cNvPr id="22" name="文本框 21"/>
           <p:cNvSpPr txBox="1"/>
           <p:nvPr/>
         </p:nvSpPr>
         <p:spPr>
-          <a:xfrm rot="0" flipH="0" flipV="0">
+          <a:xfrm>
             <a:off x="1143000" y="3200400"/>
             <a:ext cx="866775" cy="390525"/>
           </a:xfrm>
-          <a:prstGeom prst="rect"/>
+          <a:prstGeom prst="rect">
+            <a:avLst/>
+          </a:prstGeom>
         </p:spPr>
         <p:txBody>
           <a:bodyPr wrap="none" lIns="0" tIns="0" rIns="0" bIns="0"/>
@@ -2037,22 +2122,30 @@
               </a:rPr>
               <a:t>· 为什么用 fountain：我们到底在重复哪五类劳动</a:t>
             </a:r>
-            <a:endParaRPr/>
-          </a:p>
-        </p:txBody>
-      </p:sp>
-      <p:sp>
-        <p:nvSpPr>
-          <p:cNvPr id="23" name=""/>
+            <a:endParaRPr lang="en-US" sz="1275">
+              <a:solidFill>
+                <a:srgbClr val="E2E8F0"/>
+              </a:solidFill>
+              <a:latin typeface="微软雅黑" panose="020B0503020204020204" charset="-122"/>
+              <a:ea typeface="微软雅黑" panose="020B0503020204020204" charset="-122"/>
+            </a:endParaRPr>
+          </a:p>
+        </p:txBody>
+      </p:sp>
+      <p:sp>
+        <p:nvSpPr>
+          <p:cNvPr id="23" name="文本框 22"/>
           <p:cNvSpPr txBox="1"/>
           <p:nvPr/>
         </p:nvSpPr>
         <p:spPr>
-          <a:xfrm rot="0" flipH="0" flipV="0">
+          <a:xfrm>
             <a:off x="1143000" y="3638550"/>
             <a:ext cx="866775" cy="390525"/>
           </a:xfrm>
-          <a:prstGeom prst="rect"/>
+          <a:prstGeom prst="rect">
+            <a:avLst/>
+          </a:prstGeom>
         </p:spPr>
         <p:txBody>
           <a:bodyPr wrap="none" lIns="0" tIns="0" rIns="0" bIns="0"/>
@@ -2072,22 +2165,30 @@
               </a:rPr>
               <a:t>· fountain 是什么：核心能力与外围模块全景</a:t>
             </a:r>
-            <a:endParaRPr/>
-          </a:p>
-        </p:txBody>
-      </p:sp>
-      <p:sp>
-        <p:nvSpPr>
-          <p:cNvPr id="24" name=""/>
+            <a:endParaRPr lang="en-US" sz="1275">
+              <a:solidFill>
+                <a:srgbClr val="E2E8F0"/>
+              </a:solidFill>
+              <a:latin typeface="微软雅黑" panose="020B0503020204020204" charset="-122"/>
+              <a:ea typeface="微软雅黑" panose="020B0503020204020204" charset="-122"/>
+            </a:endParaRPr>
+          </a:p>
+        </p:txBody>
+      </p:sp>
+      <p:sp>
+        <p:nvSpPr>
+          <p:cNvPr id="24" name="文本框 23"/>
           <p:cNvSpPr txBox="1"/>
           <p:nvPr/>
         </p:nvSpPr>
         <p:spPr>
-          <a:xfrm rot="0" flipH="0" flipV="0">
+          <a:xfrm>
             <a:off x="1143000" y="4076700"/>
             <a:ext cx="866775" cy="390525"/>
           </a:xfrm>
-          <a:prstGeom prst="rect"/>
+          <a:prstGeom prst="rect">
+            <a:avLst/>
+          </a:prstGeom>
         </p:spPr>
         <p:txBody>
           <a:bodyPr wrap="none" lIns="0" tIns="0" rIns="0" bIns="0"/>
@@ -2107,18 +2208,24 @@
               </a:rPr>
               <a:t>· 课程地图与录制前的环境检查</a:t>
             </a:r>
-            <a:endParaRPr/>
-          </a:p>
-        </p:txBody>
-      </p:sp>
-      <p:sp>
-        <p:nvSpPr>
-          <p:cNvPr id="25" name=""/>
+            <a:endParaRPr lang="en-US" sz="1275">
+              <a:solidFill>
+                <a:srgbClr val="E2E8F0"/>
+              </a:solidFill>
+              <a:latin typeface="微软雅黑" panose="020B0503020204020204" charset="-122"/>
+              <a:ea typeface="微软雅黑" panose="020B0503020204020204" charset="-122"/>
+            </a:endParaRPr>
+          </a:p>
+        </p:txBody>
+      </p:sp>
+      <p:sp>
+        <p:nvSpPr>
+          <p:cNvPr id="25" name="矩形 24"/>
           <p:cNvSpPr/>
           <p:nvPr/>
         </p:nvSpPr>
         <p:spPr>
-          <a:xfrm rot="0" flipH="0" flipV="0">
+          <a:xfrm>
             <a:off x="1143000" y="4762500"/>
             <a:ext cx="38100" cy="381000"/>
           </a:xfrm>
@@ -2128,7 +2235,6 @@
           <a:solidFill>
             <a:srgbClr val="F59E0B"/>
           </a:solidFill>
-          <a:ln/>
         </p:spPr>
         <p:txBody>
           <a:bodyPr/>
@@ -2137,16 +2243,18 @@
       </p:sp>
       <p:sp>
         <p:nvSpPr>
-          <p:cNvPr id="26" name=""/>
+          <p:cNvPr id="26" name="文本框 25"/>
           <p:cNvSpPr txBox="1"/>
           <p:nvPr/>
         </p:nvSpPr>
         <p:spPr>
-          <a:xfrm rot="0" flipH="0" flipV="0">
+          <a:xfrm>
             <a:off x="1371600" y="4857750"/>
             <a:ext cx="1057275" cy="190500"/>
           </a:xfrm>
-          <a:prstGeom prst="rect"/>
+          <a:prstGeom prst="rect">
+            <a:avLst/>
+          </a:prstGeom>
         </p:spPr>
         <p:txBody>
           <a:bodyPr wrap="none" lIns="0" tIns="0" rIns="0" bIns="0"/>
@@ -2166,22 +2274,30 @@
               </a:rPr>
               <a:t>下一讲：三个设计决策与上台准备</a:t>
             </a:r>
-            <a:endParaRPr/>
-          </a:p>
-        </p:txBody>
-      </p:sp>
-      <p:sp>
-        <p:nvSpPr>
-          <p:cNvPr id="27" name=""/>
+            <a:endParaRPr lang="en-US" sz="1200" b="1">
+              <a:solidFill>
+                <a:srgbClr val="F59E0B"/>
+              </a:solidFill>
+              <a:latin typeface="微软雅黑" panose="020B0503020204020204" charset="-122"/>
+              <a:ea typeface="微软雅黑" panose="020B0503020204020204" charset="-122"/>
+            </a:endParaRPr>
+          </a:p>
+        </p:txBody>
+      </p:sp>
+      <p:sp>
+        <p:nvSpPr>
+          <p:cNvPr id="27" name="文本框 26"/>
           <p:cNvSpPr txBox="1"/>
           <p:nvPr/>
         </p:nvSpPr>
         <p:spPr>
-          <a:xfrm rot="0" flipH="0" flipV="0">
+          <a:xfrm>
             <a:off x="609600" y="6362700"/>
             <a:ext cx="4352925" cy="152400"/>
           </a:xfrm>
-          <a:prstGeom prst="rect"/>
+          <a:prstGeom prst="rect">
+            <a:avLst/>
+          </a:prstGeom>
         </p:spPr>
         <p:txBody>
           <a:bodyPr wrap="none" lIns="0" tIns="0" rIns="0" bIns="0"/>
@@ -2199,7 +2315,7 @@
                 <a:latin typeface="微软雅黑" panose="020B0503020204020204" charset="-122"/>
                 <a:ea typeface="微软雅黑" panose="020B0503020204020204" charset="-122"/>
               </a:rPr>
-              <a:t xml:space="preserve">fountain · </a:t>
+              <a:t>fountain · </a:t>
             </a:r>
             <a:r>
               <a:rPr lang="zh-CN" sz="975">
@@ -2212,14 +2328,13 @@
               <a:t>一站式服务器应用开发工具库　　</a:t>
             </a:r>
             <a:r>
-              <a:rPr u="none" lang="en-US" sz="975">
+              <a:rPr lang="en-US" sz="975" u="none">
                 <a:solidFill>
                   <a:srgbClr val="64748B"/>
                 </a:solidFill>
                 <a:latin typeface="微软雅黑" panose="020B0503020204020204" charset="-122"/>
                 <a:ea typeface="微软雅黑" panose="020B0503020204020204" charset="-122"/>
               </a:rPr>
-              <a:hlinkClick r:id="rIdHlink1"/>
               <a:t>https://pkg.cangjie-lang.cn/org/fountain</a:t>
             </a:r>
             <a:r>
@@ -2233,22 +2348,30 @@
               <a:t>　　</a:t>
             </a:r>
             <a:r>
-              <a:rPr u="none" lang="en-US" sz="975">
+              <a:rPr lang="en-US" sz="975" u="none">
                 <a:solidFill>
                   <a:srgbClr val="64748B"/>
                 </a:solidFill>
                 <a:latin typeface="微软雅黑" panose="020B0503020204020204" charset="-122"/>
                 <a:ea typeface="微软雅黑" panose="020B0503020204020204" charset="-122"/>
               </a:rPr>
-              <a:hlinkClick r:id="rIdHlink2"/>
               <a:t>https://gitcode.com/Cangjie-SIG/fountain</a:t>
             </a:r>
-            <a:endParaRPr/>
+            <a:endParaRPr lang="en-US" sz="975" u="none">
+              <a:solidFill>
+                <a:srgbClr val="64748B"/>
+              </a:solidFill>
+              <a:latin typeface="微软雅黑" panose="020B0503020204020204" charset="-122"/>
+              <a:ea typeface="微软雅黑" panose="020B0503020204020204" charset="-122"/>
+            </a:endParaRPr>
           </a:p>
         </p:txBody>
       </p:sp>
     </p:spTree>
   </p:cSld>
+  <p:clrMapOvr>
+    <a:masterClrMapping/>
+  </p:clrMapOvr>
 </p:sld>
 </file>
 
@@ -3120,7 +3243,7 @@
                 </a:solidFill>
                 <a:latin typeface="微软雅黑" panose="020B0503020204020204" charset="-122"/>
                 <a:ea typeface="微软雅黑" panose="020B0503020204020204" charset="-122"/>
-                <a:hlinkClick r:id="rIdHlink1"/>
+                <a:hlinkClick r:id="rId1"/>
               </a:rPr>
               <a:t>https://pkg.cangjie-lang.cn/org/fountain</a:t>
             </a:r>
@@ -3141,7 +3264,7 @@
                 </a:solidFill>
                 <a:latin typeface="微软雅黑" panose="020B0503020204020204" charset="-122"/>
                 <a:ea typeface="微软雅黑" panose="020B0503020204020204" charset="-122"/>
-                <a:hlinkClick r:id="rIdHlink2"/>
+                <a:hlinkClick r:id="rId1"/>
               </a:rPr>
               <a:t>https://gitcode.com/Cangjie-SIG/fountain</a:t>
             </a:r>
@@ -4978,7 +5101,7 @@
                 </a:solidFill>
                 <a:latin typeface="微软雅黑" panose="020B0503020204020204" charset="-122"/>
                 <a:ea typeface="微软雅黑" panose="020B0503020204020204" charset="-122"/>
-                <a:hlinkClick r:id="rIdHlink1"/>
+                <a:hlinkClick r:id="rId1"/>
               </a:rPr>
               <a:t>https://pkg.cangjie-lang.cn/org/fountain</a:t>
             </a:r>
@@ -4999,7 +5122,7 @@
                 </a:solidFill>
                 <a:latin typeface="微软雅黑" panose="020B0503020204020204" charset="-122"/>
                 <a:ea typeface="微软雅黑" panose="020B0503020204020204" charset="-122"/>
-                <a:hlinkClick r:id="rIdHlink2"/>
+                <a:hlinkClick r:id="rId1"/>
               </a:rPr>
               <a:t>https://gitcode.com/Cangjie-SIG/fountain</a:t>
             </a:r>
@@ -8623,7 +8746,7 @@
                 </a:solidFill>
                 <a:latin typeface="微软雅黑" panose="020B0503020204020204" charset="-122"/>
                 <a:ea typeface="微软雅黑" panose="020B0503020204020204" charset="-122"/>
-                <a:hlinkClick r:id="rIdHlink1"/>
+                <a:hlinkClick r:id="rId1"/>
               </a:rPr>
               <a:t>https://pkg.cangjie-lang.cn/org/fountain</a:t>
             </a:r>
@@ -8644,7 +8767,7 @@
                 </a:solidFill>
                 <a:latin typeface="微软雅黑" panose="020B0503020204020204" charset="-122"/>
                 <a:ea typeface="微软雅黑" panose="020B0503020204020204" charset="-122"/>
-                <a:hlinkClick r:id="rIdHlink2"/>
+                <a:hlinkClick r:id="rId1"/>
               </a:rPr>
               <a:t>https://gitcode.com/Cangjie-SIG/fountain</a:t>
             </a:r>
@@ -9433,7 +9556,7 @@
                 </a:solidFill>
                 <a:latin typeface="微软雅黑" panose="020B0503020204020204" charset="-122"/>
                 <a:ea typeface="微软雅黑" panose="020B0503020204020204" charset="-122"/>
-                <a:hlinkClick r:id="rIdHlink1"/>
+                <a:hlinkClick r:id="rId1"/>
               </a:rPr>
               <a:t>https://pkg.cangjie-lang.cn/org/fountain</a:t>
             </a:r>
@@ -9454,7 +9577,7 @@
                 </a:solidFill>
                 <a:latin typeface="微软雅黑" panose="020B0503020204020204" charset="-122"/>
                 <a:ea typeface="微软雅黑" panose="020B0503020204020204" charset="-122"/>
-                <a:hlinkClick r:id="rIdHlink2"/>
+                <a:hlinkClick r:id="rId1"/>
               </a:rPr>
               <a:t>https://gitcode.com/Cangjie-SIG/fountain</a:t>
             </a:r>
@@ -10191,7 +10314,7 @@
                 </a:solidFill>
                 <a:latin typeface="微软雅黑" panose="020B0503020204020204" charset="-122"/>
                 <a:ea typeface="微软雅黑" panose="020B0503020204020204" charset="-122"/>
-                <a:hlinkClick r:id="rIdHlink1"/>
+                <a:hlinkClick r:id="rId1"/>
               </a:rPr>
               <a:t>https://pkg.cangjie-lang.cn/org/fountain</a:t>
             </a:r>
@@ -10212,7 +10335,7 @@
                 </a:solidFill>
                 <a:latin typeface="微软雅黑" panose="020B0503020204020204" charset="-122"/>
                 <a:ea typeface="微软雅黑" panose="020B0503020204020204" charset="-122"/>
-                <a:hlinkClick r:id="rIdHlink2"/>
+                <a:hlinkClick r:id="rId1"/>
               </a:rPr>
               <a:t>https://gitcode.com/Cangjie-SIG/fountain</a:t>
             </a:r>
@@ -11669,7 +11792,7 @@
                 </a:solidFill>
                 <a:latin typeface="微软雅黑" panose="020B0503020204020204" charset="-122"/>
                 <a:ea typeface="微软雅黑" panose="020B0503020204020204" charset="-122"/>
-                <a:hlinkClick r:id="rIdHlink1"/>
+                <a:hlinkClick r:id="rId1"/>
               </a:rPr>
               <a:t>https://pkg.cangjie-lang.cn/org/fountain</a:t>
             </a:r>
@@ -11690,7 +11813,7 @@
                 </a:solidFill>
                 <a:latin typeface="微软雅黑" panose="020B0503020204020204" charset="-122"/>
                 <a:ea typeface="微软雅黑" panose="020B0503020204020204" charset="-122"/>
-                <a:hlinkClick r:id="rIdHlink2"/>
+                <a:hlinkClick r:id="rId1"/>
               </a:rPr>
               <a:t>https://gitcode.com/Cangjie-SIG/fountain</a:t>
             </a:r>
@@ -14407,7 +14530,7 @@
                 </a:solidFill>
                 <a:latin typeface="微软雅黑" panose="020B0503020204020204" charset="-122"/>
                 <a:ea typeface="微软雅黑" panose="020B0503020204020204" charset="-122"/>
-                <a:hlinkClick r:id="rIdHlink1"/>
+                <a:hlinkClick r:id="rId1"/>
               </a:rPr>
               <a:t>https://pkg.cangjie-lang.cn/org/fountain</a:t>
             </a:r>
@@ -14428,7 +14551,7 @@
                 </a:solidFill>
                 <a:latin typeface="微软雅黑" panose="020B0503020204020204" charset="-122"/>
                 <a:ea typeface="微软雅黑" panose="020B0503020204020204" charset="-122"/>
-                <a:hlinkClick r:id="rIdHlink2"/>
+                <a:hlinkClick r:id="rId1"/>
               </a:rPr>
               <a:t>https://gitcode.com/Cangjie-SIG/fountain</a:t>
             </a:r>
@@ -16012,7 +16135,7 @@
                 </a:solidFill>
                 <a:latin typeface="微软雅黑" panose="020B0503020204020204" charset="-122"/>
                 <a:ea typeface="微软雅黑" panose="020B0503020204020204" charset="-122"/>
-                <a:hlinkClick r:id="rIdHlink1"/>
+                <a:hlinkClick r:id="rId1"/>
               </a:rPr>
               <a:t>https://pkg.cangjie-lang.cn/org/fountain</a:t>
             </a:r>
@@ -16033,7 +16156,7 @@
                 </a:solidFill>
                 <a:latin typeface="微软雅黑" panose="020B0503020204020204" charset="-122"/>
                 <a:ea typeface="微软雅黑" panose="020B0503020204020204" charset="-122"/>
-                <a:hlinkClick r:id="rIdHlink2"/>
+                <a:hlinkClick r:id="rId1"/>
               </a:rPr>
               <a:t>https://gitcode.com/Cangjie-SIG/fountain</a:t>
             </a:r>
